--- a/docs/poc/salesperson_connect_guide.pptx
+++ b/docs/poc/salesperson_connect_guide.pptx
@@ -13,6 +13,11 @@
     <p:sldId id="261" r:id="rId7"/>
     <p:sldId id="262" r:id="rId8"/>
     <p:sldId id="263" r:id="rId9"/>
+    <p:sldId id="264" r:id="rId15"/>
+    <p:sldId id="265" r:id="rId16"/>
+    <p:sldId id="266" r:id="rId17"/>
+    <p:sldId id="267" r:id="rId18"/>
+    <p:sldId id="268" r:id="rId19"/>
   </p:sldIdLst>
   <p:notesMasterIdLst>
     <p:notesMasterId r:id="rId10"/>
@@ -1741,6 +1746,786 @@
 </p:sld>
 </file>
 
+<file path=ppt/slides/slide10.xml><?xml version="1.0" encoding="utf-8"?>
+<p:sld xmlns:a="http://schemas.openxmlformats.org/drawingml/2006/main" xmlns:p="http://schemas.openxmlformats.org/presentationml/2006/main" xmlns:r="http://schemas.openxmlformats.org/officeDocument/2006/relationships">
+  <p:cSld>
+    <p:bg>
+      <p:bgPr>
+        <a:solidFill>
+          <a:srgbClr val="FFFFFF"/>
+        </a:solidFill>
+        <a:effectLst/>
+      </p:bgPr>
+    </p:bg>
+    <p:spTree>
+      <p:nvGrpSpPr>
+        <p:cNvPr id="1" name=""/>
+        <p:cNvGrpSpPr/>
+        <p:nvPr/>
+      </p:nvGrpSpPr>
+      <p:grpSpPr/>
+      <p:sp>
+        <p:nvSpPr>
+          <p:cNvPr id="2" name="TextBox 1"/>
+          <p:cNvSpPr txBox="1"/>
+          <p:nvPr/>
+        </p:nvSpPr>
+        <p:spPr>
+          <a:xfrm>
+            <a:off x="731520" y="502920"/>
+            <a:ext cx="10698480" cy="914400"/>
+          </a:xfrm>
+          <a:prstGeom prst="rect">
+            <a:avLst/>
+          </a:prstGeom>
+          <a:noFill/>
+        </p:spPr>
+        <p:txBody>
+          <a:bodyPr wrap="square">
+            <a:spAutoFit/>
+          </a:bodyPr>
+          <a:lstStyle/>
+          <a:p>
+            <a:r>
+              <a:rPr sz="3000" b="1">
+                <a:solidFill>
+                  <a:srgbClr val="028090"/>
+                </a:solidFill>
+                <a:latin typeface="Hiragino Sans"/>
+              </a:rPr>
+              <a:t>全体の流れ（4ステップ）</a:t>
+            </a:r>
+          </a:p>
+        </p:txBody>
+      </p:sp>
+      <p:sp>
+        <p:nvSpPr>
+          <p:cNvPr id="3" name="TextBox 2"/>
+          <p:cNvSpPr txBox="1"/>
+          <p:nvPr/>
+        </p:nvSpPr>
+        <p:spPr>
+          <a:xfrm>
+            <a:off x="868680" y="1783080"/>
+            <a:ext cx="10424160" cy="4663440"/>
+          </a:xfrm>
+          <a:prstGeom prst="rect">
+            <a:avLst/>
+          </a:prstGeom>
+          <a:noFill/>
+        </p:spPr>
+        <p:txBody>
+          <a:bodyPr wrap="square">
+            <a:spAutoFit/>
+          </a:bodyPr>
+          <a:lstStyle/>
+          <a:p>
+            <a:pPr>
+              <a:spcBef>
+                <a:spcPts val="0"/>
+              </a:spcBef>
+            </a:pPr>
+            <a:r>
+              <a:rPr sz="2000" b="1">
+                <a:solidFill>
+                  <a:srgbClr val="12343B"/>
+                </a:solidFill>
+                <a:latin typeface="Hiragino Sans"/>
+              </a:rPr>
+              <a:t>① サーバを常設する（EC2・RDSと同じVPC）</a:t>
+            </a:r>
+          </a:p>
+          <a:p>
+            <a:pPr>
+              <a:spcBef>
+                <a:spcPts val="400"/>
+              </a:spcBef>
+            </a:pPr>
+            <a:r>
+              <a:rPr sz="1500" b="0">
+                <a:solidFill>
+                  <a:srgbClr val="5B7682"/>
+                </a:solidFill>
+                <a:latin typeface="Hiragino Sans"/>
+              </a:rPr>
+              <a:t>　受け口(connect_web)と管理画面を“公開URL”で24時間稼働させる</a:t>
+            </a:r>
+          </a:p>
+          <a:p>
+            <a:pPr>
+              <a:spcBef>
+                <a:spcPts val="1400"/>
+              </a:spcBef>
+            </a:pPr>
+            <a:r>
+              <a:rPr sz="2000" b="1">
+                <a:solidFill>
+                  <a:srgbClr val="12343B"/>
+                </a:solidFill>
+                <a:latin typeface="Hiragino Sans"/>
+              </a:rPr>
+              <a:t>② 連携リンクを作る</a:t>
+            </a:r>
+          </a:p>
+          <a:p>
+            <a:pPr>
+              <a:spcBef>
+                <a:spcPts val="400"/>
+              </a:spcBef>
+            </a:pPr>
+            <a:r>
+              <a:rPr sz="1500" b="0">
+                <a:solidFill>
+                  <a:srgbClr val="5B7682"/>
+                </a:solidFill>
+                <a:latin typeface="Hiragino Sans"/>
+              </a:rPr>
+              <a:t>　make_connect_links で全営業分のリンクを一括生成</a:t>
+            </a:r>
+          </a:p>
+          <a:p>
+            <a:pPr>
+              <a:spcBef>
+                <a:spcPts val="1400"/>
+              </a:spcBef>
+            </a:pPr>
+            <a:r>
+              <a:rPr sz="2000" b="1">
+                <a:solidFill>
+                  <a:srgbClr val="12343B"/>
+                </a:solidFill>
+                <a:latin typeface="Hiragino Sans"/>
+              </a:rPr>
+              <a:t>③ 営業に配る</a:t>
+            </a:r>
+          </a:p>
+          <a:p>
+            <a:pPr>
+              <a:spcBef>
+                <a:spcPts val="400"/>
+              </a:spcBef>
+            </a:pPr>
+            <a:r>
+              <a:rPr sz="1500" b="0">
+                <a:solidFill>
+                  <a:srgbClr val="5B7682"/>
+                </a:solidFill>
+                <a:latin typeface="Hiragino Sans"/>
+              </a:rPr>
+              <a:t>　Slack/メールで本人にリンク＋このガイドを送る</a:t>
+            </a:r>
+          </a:p>
+          <a:p>
+            <a:pPr>
+              <a:spcBef>
+                <a:spcPts val="1400"/>
+              </a:spcBef>
+            </a:pPr>
+            <a:r>
+              <a:rPr sz="2000" b="1">
+                <a:solidFill>
+                  <a:srgbClr val="12343B"/>
+                </a:solidFill>
+                <a:latin typeface="Hiragino Sans"/>
+              </a:rPr>
+              <a:t>④ 管理画面で見守る</a:t>
+            </a:r>
+          </a:p>
+          <a:p>
+            <a:pPr>
+              <a:spcBef>
+                <a:spcPts val="400"/>
+              </a:spcBef>
+            </a:pPr>
+            <a:r>
+              <a:rPr sz="1500" b="0">
+                <a:solidFill>
+                  <a:srgbClr val="5B7682"/>
+                </a:solidFill>
+                <a:latin typeface="Hiragino Sans"/>
+              </a:rPr>
+              <a:t>　連携状況・利用状況・コスト・混雑をいつでも確認</a:t>
+            </a:r>
+          </a:p>
+        </p:txBody>
+      </p:sp>
+    </p:spTree>
+  </p:cSld>
+  <p:clrMapOvr>
+    <a:masterClrMapping/>
+  </p:clrMapOvr>
+</p:sld>
+</file>
+
+<file path=ppt/slides/slide11.xml><?xml version="1.0" encoding="utf-8"?>
+<p:sld xmlns:a="http://schemas.openxmlformats.org/drawingml/2006/main" xmlns:p="http://schemas.openxmlformats.org/presentationml/2006/main" xmlns:r="http://schemas.openxmlformats.org/officeDocument/2006/relationships">
+  <p:cSld>
+    <p:bg>
+      <p:bgPr>
+        <a:solidFill>
+          <a:srgbClr val="FFFFFF"/>
+        </a:solidFill>
+        <a:effectLst/>
+      </p:bgPr>
+    </p:bg>
+    <p:spTree>
+      <p:nvGrpSpPr>
+        <p:cNvPr id="1" name=""/>
+        <p:cNvGrpSpPr/>
+        <p:nvPr/>
+      </p:nvGrpSpPr>
+      <p:grpSpPr/>
+      <p:sp>
+        <p:nvSpPr>
+          <p:cNvPr id="2" name="TextBox 1"/>
+          <p:cNvSpPr txBox="1"/>
+          <p:nvPr/>
+        </p:nvSpPr>
+        <p:spPr>
+          <a:xfrm>
+            <a:off x="731520" y="502920"/>
+            <a:ext cx="10698480" cy="914400"/>
+          </a:xfrm>
+          <a:prstGeom prst="rect">
+            <a:avLst/>
+          </a:prstGeom>
+          <a:noFill/>
+        </p:spPr>
+        <p:txBody>
+          <a:bodyPr wrap="square">
+            <a:spAutoFit/>
+          </a:bodyPr>
+          <a:lstStyle/>
+          <a:p>
+            <a:r>
+              <a:rPr sz="3000" b="1">
+                <a:solidFill>
+                  <a:srgbClr val="028090"/>
+                </a:solidFill>
+                <a:latin typeface="Hiragino Sans"/>
+              </a:rPr>
+              <a:t>STEP 1　サーバを常設する（技術は Claude が伴走）</a:t>
+            </a:r>
+          </a:p>
+        </p:txBody>
+      </p:sp>
+      <p:sp>
+        <p:nvSpPr>
+          <p:cNvPr id="3" name="TextBox 2"/>
+          <p:cNvSpPr txBox="1"/>
+          <p:nvPr/>
+        </p:nvSpPr>
+        <p:spPr>
+          <a:xfrm>
+            <a:off x="868680" y="1783080"/>
+            <a:ext cx="10424160" cy="4663440"/>
+          </a:xfrm>
+          <a:prstGeom prst="rect">
+            <a:avLst/>
+          </a:prstGeom>
+          <a:noFill/>
+        </p:spPr>
+        <p:txBody>
+          <a:bodyPr wrap="square">
+            <a:spAutoFit/>
+          </a:bodyPr>
+          <a:lstStyle/>
+          <a:p>
+            <a:pPr>
+              <a:spcBef>
+                <a:spcPts val="0"/>
+              </a:spcBef>
+            </a:pPr>
+            <a:r>
+              <a:rPr sz="1900" b="1">
+                <a:solidFill>
+                  <a:srgbClr val="12343B"/>
+                </a:solidFill>
+                <a:latin typeface="Hiragino Sans"/>
+              </a:rPr>
+              <a:t>RDSと同じVPCのEC2に置くのがベスト</a:t>
+            </a:r>
+          </a:p>
+          <a:p>
+            <a:pPr>
+              <a:spcBef>
+                <a:spcPts val="400"/>
+              </a:spcBef>
+            </a:pPr>
+            <a:r>
+              <a:rPr sz="1500" b="0">
+                <a:solidFill>
+                  <a:srgbClr val="5B7682"/>
+                </a:solidFill>
+                <a:latin typeface="Hiragino Sans"/>
+              </a:rPr>
+              <a:t>　→ トンネル不要・実HTTPS・24時間稼働。ノートPCのスリープ/切断で落ちない。</a:t>
+            </a:r>
+          </a:p>
+          <a:p>
+            <a:pPr>
+              <a:spcBef>
+                <a:spcPts val="1400"/>
+              </a:spcBef>
+            </a:pPr>
+            <a:r>
+              <a:rPr sz="1900" b="1">
+                <a:solidFill>
+                  <a:srgbClr val="12343B"/>
+                </a:solidFill>
+                <a:latin typeface="Hiragino Sans"/>
+              </a:rPr>
+              <a:t>事前に用意するもの（管理者）</a:t>
+            </a:r>
+          </a:p>
+          <a:p>
+            <a:pPr>
+              <a:spcBef>
+                <a:spcPts val="600"/>
+              </a:spcBef>
+            </a:pPr>
+            <a:r>
+              <a:rPr sz="1500" b="0">
+                <a:solidFill>
+                  <a:srgbClr val="5B7682"/>
+                </a:solidFill>
+                <a:latin typeface="Hiragino Sans"/>
+              </a:rPr>
+              <a:t>・Web型 OAuthクライアント（リダイレクトURIを公開URLで登録）</a:t>
+            </a:r>
+          </a:p>
+          <a:p>
+            <a:pPr>
+              <a:spcBef>
+                <a:spcPts val="400"/>
+              </a:spcBef>
+            </a:pPr>
+            <a:r>
+              <a:rPr sz="1500" b="0">
+                <a:solidFill>
+                  <a:srgbClr val="5B7682"/>
+                </a:solidFill>
+                <a:latin typeface="Hiragino Sans"/>
+              </a:rPr>
+              <a:t>・OAUTH_STATE_SECRET（強いランダム値・全プロセスで同一）</a:t>
+            </a:r>
+          </a:p>
+          <a:p>
+            <a:pPr>
+              <a:spcBef>
+                <a:spcPts val="400"/>
+              </a:spcBef>
+            </a:pPr>
+            <a:r>
+              <a:rPr sz="1500" b="0">
+                <a:solidFill>
+                  <a:srgbClr val="5B7682"/>
+                </a:solidFill>
+                <a:latin typeface="Hiragino Sans"/>
+              </a:rPr>
+              <a:t>・KMS鍵 / RDS接続 / クライアント・シークレット（再生成推奨）</a:t>
+            </a:r>
+          </a:p>
+          <a:p>
+            <a:pPr>
+              <a:spcBef>
+                <a:spcPts val="1400"/>
+              </a:spcBef>
+            </a:pPr>
+            <a:r>
+              <a:rPr sz="1400" b="0">
+                <a:solidFill>
+                  <a:srgbClr val="5B7682"/>
+                </a:solidFill>
+                <a:latin typeface="Hiragino Sans"/>
+              </a:rPr>
+              <a:t>※ 具体的なデプロイ手順とコマンドは Claude が用意し、一緒に進めます。</a:t>
+            </a:r>
+          </a:p>
+        </p:txBody>
+      </p:sp>
+    </p:spTree>
+  </p:cSld>
+  <p:clrMapOvr>
+    <a:masterClrMapping/>
+  </p:clrMapOvr>
+</p:sld>
+</file>
+
+<file path=ppt/slides/slide12.xml><?xml version="1.0" encoding="utf-8"?>
+<p:sld xmlns:a="http://schemas.openxmlformats.org/drawingml/2006/main" xmlns:p="http://schemas.openxmlformats.org/presentationml/2006/main" xmlns:r="http://schemas.openxmlformats.org/officeDocument/2006/relationships">
+  <p:cSld>
+    <p:bg>
+      <p:bgPr>
+        <a:solidFill>
+          <a:srgbClr val="FFFFFF"/>
+        </a:solidFill>
+        <a:effectLst/>
+      </p:bgPr>
+    </p:bg>
+    <p:spTree>
+      <p:nvGrpSpPr>
+        <p:cNvPr id="1" name=""/>
+        <p:cNvGrpSpPr/>
+        <p:nvPr/>
+      </p:nvGrpSpPr>
+      <p:grpSpPr/>
+      <p:sp>
+        <p:nvSpPr>
+          <p:cNvPr id="2" name="TextBox 1"/>
+          <p:cNvSpPr txBox="1"/>
+          <p:nvPr/>
+        </p:nvSpPr>
+        <p:spPr>
+          <a:xfrm>
+            <a:off x="731520" y="502920"/>
+            <a:ext cx="10698480" cy="914400"/>
+          </a:xfrm>
+          <a:prstGeom prst="rect">
+            <a:avLst/>
+          </a:prstGeom>
+          <a:noFill/>
+        </p:spPr>
+        <p:txBody>
+          <a:bodyPr wrap="square">
+            <a:spAutoFit/>
+          </a:bodyPr>
+          <a:lstStyle/>
+          <a:p>
+            <a:r>
+              <a:rPr sz="3000" b="1">
+                <a:solidFill>
+                  <a:srgbClr val="028090"/>
+                </a:solidFill>
+                <a:latin typeface="Hiragino Sans"/>
+              </a:rPr>
+              <a:t>STEP 2-3　リンクを作って配る</a:t>
+            </a:r>
+          </a:p>
+        </p:txBody>
+      </p:sp>
+      <p:sp>
+        <p:nvSpPr>
+          <p:cNvPr id="3" name="TextBox 2"/>
+          <p:cNvSpPr txBox="1"/>
+          <p:nvPr/>
+        </p:nvSpPr>
+        <p:spPr>
+          <a:xfrm>
+            <a:off x="868680" y="1783080"/>
+            <a:ext cx="10424160" cy="4663440"/>
+          </a:xfrm>
+          <a:prstGeom prst="rect">
+            <a:avLst/>
+          </a:prstGeom>
+          <a:noFill/>
+        </p:spPr>
+        <p:txBody>
+          <a:bodyPr wrap="square">
+            <a:spAutoFit/>
+          </a:bodyPr>
+          <a:lstStyle/>
+          <a:p>
+            <a:pPr>
+              <a:spcBef>
+                <a:spcPts val="0"/>
+              </a:spcBef>
+            </a:pPr>
+            <a:r>
+              <a:rPr sz="1900" b="1">
+                <a:solidFill>
+                  <a:srgbClr val="12343B"/>
+                </a:solidFill>
+                <a:latin typeface="Hiragino Sans"/>
+              </a:rPr>
+              <a:t>リンク生成（管理者が1回）</a:t>
+            </a:r>
+          </a:p>
+          <a:p>
+            <a:pPr>
+              <a:spcBef>
+                <a:spcPts val="400"/>
+              </a:spcBef>
+            </a:pPr>
+            <a:r>
+              <a:rPr sz="1500" b="0">
+                <a:solidFill>
+                  <a:srgbClr val="5B7682"/>
+                </a:solidFill>
+                <a:latin typeface="Hiragino Sans"/>
+              </a:rPr>
+              <a:t>　make_connect_links に営業のメールを渡す → 1人1本のリンクが出力</a:t>
+            </a:r>
+          </a:p>
+          <a:p>
+            <a:pPr>
+              <a:spcBef>
+                <a:spcPts val="1400"/>
+              </a:spcBef>
+            </a:pPr>
+            <a:r>
+              <a:rPr sz="1900" b="1">
+                <a:solidFill>
+                  <a:srgbClr val="12343B"/>
+                </a:solidFill>
+                <a:latin typeface="Hiragino Sans"/>
+              </a:rPr>
+              <a:t>配布</a:t>
+            </a:r>
+          </a:p>
+          <a:p>
+            <a:pPr>
+              <a:spcBef>
+                <a:spcPts val="400"/>
+              </a:spcBef>
+            </a:pPr>
+            <a:r>
+              <a:rPr sz="1500" b="0">
+                <a:solidFill>
+                  <a:srgbClr val="5B7682"/>
+                </a:solidFill>
+                <a:latin typeface="Hiragino Sans"/>
+              </a:rPr>
+              <a:t>　各リンクを“本人だけ”にSlack DM/メールで送付（このガイドを添えると親切）</a:t>
+            </a:r>
+          </a:p>
+          <a:p>
+            <a:pPr>
+              <a:spcBef>
+                <a:spcPts val="1400"/>
+              </a:spcBef>
+            </a:pPr>
+            <a:r>
+              <a:rPr sz="1900" b="1">
+                <a:solidFill>
+                  <a:srgbClr val="12343B"/>
+                </a:solidFill>
+                <a:latin typeface="Hiragino Sans"/>
+              </a:rPr>
+              <a:t>営業の操作（このガイドの前半）</a:t>
+            </a:r>
+          </a:p>
+          <a:p>
+            <a:pPr>
+              <a:spcBef>
+                <a:spcPts val="400"/>
+              </a:spcBef>
+            </a:pPr>
+            <a:r>
+              <a:rPr sz="1500" b="0">
+                <a:solidFill>
+                  <a:srgbClr val="5B7682"/>
+                </a:solidFill>
+                <a:latin typeface="Hiragino Sans"/>
+              </a:rPr>
+              <a:t>　届いたリンクを開く → 自分のGoogleでログイン →「許可」だけ。完了。</a:t>
+            </a:r>
+          </a:p>
+          <a:p>
+            <a:pPr>
+              <a:spcBef>
+                <a:spcPts val="1400"/>
+              </a:spcBef>
+            </a:pPr>
+            <a:r>
+              <a:rPr sz="1400" b="0">
+                <a:solidFill>
+                  <a:srgbClr val="5B7682"/>
+                </a:solidFill>
+                <a:latin typeface="Hiragino Sans"/>
+              </a:rPr>
+              <a:t>⚠️ “正しい人に正しいリンク”を。本人は自分の会社アカウントで許可すること。</a:t>
+            </a:r>
+          </a:p>
+        </p:txBody>
+      </p:sp>
+    </p:spTree>
+  </p:cSld>
+  <p:clrMapOvr>
+    <a:masterClrMapping/>
+  </p:clrMapOvr>
+</p:sld>
+</file>
+
+<file path=ppt/slides/slide13.xml><?xml version="1.0" encoding="utf-8"?>
+<p:sld xmlns:a="http://schemas.openxmlformats.org/drawingml/2006/main" xmlns:p="http://schemas.openxmlformats.org/presentationml/2006/main" xmlns:r="http://schemas.openxmlformats.org/officeDocument/2006/relationships">
+  <p:cSld>
+    <p:bg>
+      <p:bgPr>
+        <a:solidFill>
+          <a:srgbClr val="FFFFFF"/>
+        </a:solidFill>
+        <a:effectLst/>
+      </p:bgPr>
+    </p:bg>
+    <p:spTree>
+      <p:nvGrpSpPr>
+        <p:cNvPr id="1" name=""/>
+        <p:cNvGrpSpPr/>
+        <p:nvPr/>
+      </p:nvGrpSpPr>
+      <p:grpSpPr/>
+      <p:sp>
+        <p:nvSpPr>
+          <p:cNvPr id="2" name="TextBox 1"/>
+          <p:cNvSpPr txBox="1"/>
+          <p:nvPr/>
+        </p:nvSpPr>
+        <p:spPr>
+          <a:xfrm>
+            <a:off x="731520" y="502920"/>
+            <a:ext cx="10698480" cy="914400"/>
+          </a:xfrm>
+          <a:prstGeom prst="rect">
+            <a:avLst/>
+          </a:prstGeom>
+          <a:noFill/>
+        </p:spPr>
+        <p:txBody>
+          <a:bodyPr wrap="square">
+            <a:spAutoFit/>
+          </a:bodyPr>
+          <a:lstStyle/>
+          <a:p>
+            <a:r>
+              <a:rPr sz="3000" b="1">
+                <a:solidFill>
+                  <a:srgbClr val="028090"/>
+                </a:solidFill>
+                <a:latin typeface="Hiragino Sans"/>
+              </a:rPr>
+              <a:t>STEP 4　管理画面で見守る ／ 安心ポイント</a:t>
+            </a:r>
+          </a:p>
+        </p:txBody>
+      </p:sp>
+      <p:sp>
+        <p:nvSpPr>
+          <p:cNvPr id="3" name="TextBox 2"/>
+          <p:cNvSpPr txBox="1"/>
+          <p:nvPr/>
+        </p:nvSpPr>
+        <p:spPr>
+          <a:xfrm>
+            <a:off x="868680" y="1783080"/>
+            <a:ext cx="10424160" cy="4663440"/>
+          </a:xfrm>
+          <a:prstGeom prst="rect">
+            <a:avLst/>
+          </a:prstGeom>
+          <a:noFill/>
+        </p:spPr>
+        <p:txBody>
+          <a:bodyPr wrap="square">
+            <a:spAutoFit/>
+          </a:bodyPr>
+          <a:lstStyle/>
+          <a:p>
+            <a:pPr>
+              <a:spcBef>
+                <a:spcPts val="0"/>
+              </a:spcBef>
+            </a:pPr>
+            <a:r>
+              <a:rPr sz="1900" b="1">
+                <a:solidFill>
+                  <a:srgbClr val="12343B"/>
+                </a:solidFill>
+                <a:latin typeface="Hiragino Sans"/>
+              </a:rPr>
+              <a:t>管理画面でいつでも確認</a:t>
+            </a:r>
+          </a:p>
+          <a:p>
+            <a:pPr>
+              <a:spcBef>
+                <a:spcPts val="400"/>
+              </a:spcBef>
+            </a:pPr>
+            <a:r>
+              <a:rPr sz="1500" b="0">
+                <a:solidFill>
+                  <a:srgbClr val="5B7682"/>
+                </a:solidFill>
+                <a:latin typeface="Hiragino Sans"/>
+              </a:rPr>
+              <a:t>　誰が連携済みか・利用状況・コスト・レイテンシ・混雑（同時実行）を一覧</a:t>
+            </a:r>
+          </a:p>
+          <a:p>
+            <a:pPr>
+              <a:spcBef>
+                <a:spcPts val="1400"/>
+              </a:spcBef>
+            </a:pPr>
+            <a:r>
+              <a:rPr sz="1900" b="1">
+                <a:solidFill>
+                  <a:srgbClr val="12343B"/>
+                </a:solidFill>
+                <a:latin typeface="Hiragino Sans"/>
+              </a:rPr>
+              <a:t>安心ポイント（営業にも伝える）</a:t>
+            </a:r>
+          </a:p>
+          <a:p>
+            <a:pPr>
+              <a:spcBef>
+                <a:spcPts val="600"/>
+              </a:spcBef>
+            </a:pPr>
+            <a:r>
+              <a:rPr sz="1500" b="0">
+                <a:solidFill>
+                  <a:srgbClr val="5B7682"/>
+                </a:solidFill>
+                <a:latin typeface="Hiragino Sans"/>
+              </a:rPr>
+              <a:t>　👀 見るだけ（readonly） ／ 🔒 本人専用（他人は見えない） ／ 🚪 いつでも解除</a:t>
+            </a:r>
+          </a:p>
+          <a:p>
+            <a:pPr>
+              <a:spcBef>
+                <a:spcPts val="400"/>
+              </a:spcBef>
+            </a:pPr>
+            <a:r>
+              <a:rPr sz="1500" b="0">
+                <a:solidFill>
+                  <a:srgbClr val="5B7682"/>
+                </a:solidFill>
+                <a:latin typeface="Hiragino Sans"/>
+              </a:rPr>
+              <a:t>　トークンは暗号化して保存。画面にも復号して出しません。</a:t>
+            </a:r>
+          </a:p>
+          <a:p>
+            <a:pPr>
+              <a:spcBef>
+                <a:spcPts val="1600"/>
+              </a:spcBef>
+            </a:pPr>
+            <a:r>
+              <a:rPr sz="1400" b="0">
+                <a:solidFill>
+                  <a:srgbClr val="5B7682"/>
+                </a:solidFill>
+                <a:latin typeface="Hiragino Sans"/>
+              </a:rPr>
+              <a:t>次の一手：本番デプロイの手順書を Claude が用意します。</a:t>
+            </a:r>
+          </a:p>
+        </p:txBody>
+      </p:sp>
+    </p:spTree>
+  </p:cSld>
+  <p:clrMapOvr>
+    <a:masterClrMapping/>
+  </p:clrMapOvr>
+</p:sld>
+</file>
+
 <file path=ppt/slides/slide2.xml><?xml version="1.0" encoding="utf-8"?>
 <p:sld xmlns:a="http://schemas.openxmlformats.org/drawingml/2006/main" xmlns:r="http://schemas.openxmlformats.org/officeDocument/2006/relationships" xmlns:p="http://schemas.openxmlformats.org/presentationml/2006/main">
   <p:cSld name="Slide 2">
@@ -5098,6 +5883,83 @@
               <a:t>困ったら：社内Slack #teamagent まで気軽にどうぞ 🙌</a:t>
             </a:r>
             <a:endParaRPr lang="en-US" sz="1400" dirty="0"/>
+          </a:p>
+        </p:txBody>
+      </p:sp>
+    </p:spTree>
+  </p:cSld>
+  <p:clrMapOvr>
+    <a:masterClrMapping/>
+  </p:clrMapOvr>
+</p:sld>
+</file>
+
+<file path=ppt/slides/slide9.xml><?xml version="1.0" encoding="utf-8"?>
+<p:sld xmlns:a="http://schemas.openxmlformats.org/drawingml/2006/main" xmlns:p="http://schemas.openxmlformats.org/presentationml/2006/main" xmlns:r="http://schemas.openxmlformats.org/officeDocument/2006/relationships">
+  <p:cSld>
+    <p:bg>
+      <p:bgPr>
+        <a:solidFill>
+          <a:srgbClr val="028090"/>
+        </a:solidFill>
+        <a:effectLst/>
+      </p:bgPr>
+    </p:bg>
+    <p:spTree>
+      <p:nvGrpSpPr>
+        <p:cNvPr id="1" name=""/>
+        <p:cNvGrpSpPr/>
+        <p:nvPr/>
+      </p:nvGrpSpPr>
+      <p:grpSpPr/>
+      <p:sp>
+        <p:nvSpPr>
+          <p:cNvPr id="2" name="TextBox 1"/>
+          <p:cNvSpPr txBox="1"/>
+          <p:nvPr/>
+        </p:nvSpPr>
+        <p:spPr>
+          <a:xfrm>
+            <a:off x="822960" y="2468880"/>
+            <a:ext cx="10515600" cy="2011680"/>
+          </a:xfrm>
+          <a:prstGeom prst="rect">
+            <a:avLst/>
+          </a:prstGeom>
+          <a:noFill/>
+        </p:spPr>
+        <p:txBody>
+          <a:bodyPr wrap="square">
+            <a:spAutoFit/>
+          </a:bodyPr>
+          <a:lstStyle/>
+          <a:p>
+            <a:pPr algn="l"/>
+            <a:r>
+              <a:rPr sz="4000" b="1">
+                <a:solidFill>
+                  <a:srgbClr val="FFFFFF"/>
+                </a:solidFill>
+                <a:latin typeface="Hiragino Sans"/>
+              </a:rPr>
+              <a:t>管理者向け：本番展開の進め方</a:t>
+            </a:r>
+          </a:p>
+          <a:p>
+            <a:pPr>
+              <a:spcBef>
+                <a:spcPts val="1000"/>
+              </a:spcBef>
+            </a:pPr>
+            <a:r>
+              <a:rPr sz="1800">
+                <a:solidFill>
+                  <a:srgbClr val="CCEEF0"/>
+                </a:solidFill>
+                <a:latin typeface="Hiragino Sans"/>
+              </a:rPr>
+              <a:t>全営業に配って実運用するまでの 4 ステップ</a:t>
+            </a:r>
           </a:p>
         </p:txBody>
       </p:sp>
